--- a/create-a-project-from-cost-opt-20260216205726/artifacts/kickoff-deck.pptx
+++ b/create-a-project-from-cost-opt-20260216205726/artifacts/kickoff-deck.pptx
@@ -979,7 +979,7 @@
 </file>
 
 <file path=ppt/slideLayouts/slideLayout1.xml><?xml version="1.0" encoding="utf-8"?>
-<p:sldLayout xmlns:a="http://schemas.openxmlformats.org/drawingml/2006/main" xmlns:r="http://schemas.openxmlformats.org/officeDocument/2006/relationships" xmlns:p="http://schemas.openxmlformats.org/presentationml/2006/main" userDrawn="1">
+<p:sldLayout xmlns:a16="http://schemas.microsoft.com/office/drawing/2014/main" xmlns:a14="http://schemas.microsoft.com/office/drawing/2010/main" xmlns:p14="http://schemas.microsoft.com/office/powerpoint/2010/main" xmlns:a="http://schemas.openxmlformats.org/drawingml/2006/main" xmlns:r="http://schemas.openxmlformats.org/officeDocument/2006/relationships" xmlns:p="http://schemas.openxmlformats.org/presentationml/2006/main" userDrawn="1">
   <p:cSld name="Intro Slide">
     <p:spTree>
       <p:nvGrpSpPr>
@@ -1417,7 +1417,7 @@
 </file>
 
 <file path=ppt/slideLayouts/slideLayout2.xml><?xml version="1.0" encoding="utf-8"?>
-<p:sldLayout xmlns:a="http://schemas.openxmlformats.org/drawingml/2006/main" xmlns:r="http://schemas.openxmlformats.org/officeDocument/2006/relationships" xmlns:p="http://schemas.openxmlformats.org/presentationml/2006/main" userDrawn="1">
+<p:sldLayout xmlns:a16="http://schemas.microsoft.com/office/drawing/2014/main" xmlns:a14="http://schemas.microsoft.com/office/drawing/2010/main" xmlns:p14="http://schemas.microsoft.com/office/powerpoint/2010/main" xmlns:a="http://schemas.openxmlformats.org/drawingml/2006/main" xmlns:r="http://schemas.openxmlformats.org/officeDocument/2006/relationships" xmlns:p="http://schemas.openxmlformats.org/presentationml/2006/main" userDrawn="1">
   <p:cSld name="Content Slide_with Eyebrow">
     <p:spTree>
       <p:nvGrpSpPr>
@@ -2651,7 +2651,7 @@
 </file>
 
 <file path=ppt/slideLayouts/slideLayout3.xml><?xml version="1.0" encoding="utf-8"?>
-<p:sldLayout xmlns:a="http://schemas.openxmlformats.org/drawingml/2006/main" xmlns:r="http://schemas.openxmlformats.org/officeDocument/2006/relationships" xmlns:p="http://schemas.openxmlformats.org/presentationml/2006/main" preserve="1" userDrawn="1">
+<p:sldLayout xmlns:a16="http://schemas.microsoft.com/office/drawing/2014/main" xmlns:a14="http://schemas.microsoft.com/office/drawing/2010/main" xmlns:p14="http://schemas.microsoft.com/office/powerpoint/2010/main" xmlns:a="http://schemas.openxmlformats.org/drawingml/2006/main" xmlns:r="http://schemas.openxmlformats.org/officeDocument/2006/relationships" xmlns:p="http://schemas.openxmlformats.org/presentationml/2006/main" preserve="1" userDrawn="1">
   <p:cSld name="Tertiary Section Intro">
     <p:spTree>
       <p:nvGrpSpPr>
@@ -3045,7 +3045,7 @@
 </file>
 
 <file path=ppt/slideLayouts/slideLayout4.xml><?xml version="1.0" encoding="utf-8"?>
-<p:sldLayout xmlns:a="http://schemas.openxmlformats.org/drawingml/2006/main" xmlns:r="http://schemas.openxmlformats.org/officeDocument/2006/relationships" xmlns:p="http://schemas.openxmlformats.org/presentationml/2006/main" preserve="1" userDrawn="1">
+<p:sldLayout xmlns:a16="http://schemas.microsoft.com/office/drawing/2014/main" xmlns:a14="http://schemas.microsoft.com/office/drawing/2010/main" xmlns:p14="http://schemas.microsoft.com/office/powerpoint/2010/main" xmlns:a="http://schemas.openxmlformats.org/drawingml/2006/main" xmlns:r="http://schemas.openxmlformats.org/officeDocument/2006/relationships" xmlns:p="http://schemas.openxmlformats.org/presentationml/2006/main" preserve="1" userDrawn="1">
   <p:cSld name="1_Custom Layout">
     <p:spTree>
       <p:nvGrpSpPr>
@@ -5024,7 +5024,7 @@
 </file>
 
 <file path=ppt/slideLayouts/slideLayout5.xml><?xml version="1.0" encoding="utf-8"?>
-<p:sldLayout xmlns:a="http://schemas.openxmlformats.org/drawingml/2006/main" xmlns:r="http://schemas.openxmlformats.org/officeDocument/2006/relationships" xmlns:p="http://schemas.openxmlformats.org/presentationml/2006/main" preserve="1" userDrawn="1">
+<p:sldLayout xmlns:a16="http://schemas.microsoft.com/office/drawing/2014/main" xmlns:a14="http://schemas.microsoft.com/office/drawing/2010/main" xmlns:p14="http://schemas.microsoft.com/office/powerpoint/2010/main" xmlns:a="http://schemas.openxmlformats.org/drawingml/2006/main" xmlns:r="http://schemas.openxmlformats.org/officeDocument/2006/relationships" xmlns:p="http://schemas.openxmlformats.org/presentationml/2006/main" preserve="1" userDrawn="1">
   <p:cSld name="In Picture_Large Scale">
     <p:spTree>
       <p:nvGrpSpPr>
@@ -7158,7 +7158,7 @@
 </file>
 
 <file path=ppt/slideLayouts/slideLayout6.xml><?xml version="1.0" encoding="utf-8"?>
-<p:sldLayout xmlns:a="http://schemas.openxmlformats.org/drawingml/2006/main" xmlns:r="http://schemas.openxmlformats.org/officeDocument/2006/relationships" xmlns:p="http://schemas.openxmlformats.org/presentationml/2006/main" preserve="1" userDrawn="1">
+<p:sldLayout xmlns:a16="http://schemas.microsoft.com/office/drawing/2014/main" xmlns:a14="http://schemas.microsoft.com/office/drawing/2010/main" xmlns:p14="http://schemas.microsoft.com/office/powerpoint/2010/main" xmlns:a="http://schemas.openxmlformats.org/drawingml/2006/main" xmlns:r="http://schemas.openxmlformats.org/officeDocument/2006/relationships" xmlns:p="http://schemas.openxmlformats.org/presentationml/2006/main" preserve="1" userDrawn="1">
   <p:cSld name="Content Slide_No Eyebrow">
     <p:spTree>
       <p:nvGrpSpPr>
@@ -8307,7 +8307,7 @@
 </file>
 
 <file path=ppt/slideLayouts/slideLayout7.xml><?xml version="1.0" encoding="utf-8"?>
-<p:sldLayout xmlns:a="http://schemas.openxmlformats.org/drawingml/2006/main" xmlns:r="http://schemas.openxmlformats.org/officeDocument/2006/relationships" xmlns:p="http://schemas.openxmlformats.org/presentationml/2006/main" preserve="1" userDrawn="1">
+<p:sldLayout xmlns:a16="http://schemas.microsoft.com/office/drawing/2014/main" xmlns:asvg="http://schemas.microsoft.com/office/drawing/2016/SVG/main" xmlns:p14="http://schemas.microsoft.com/office/powerpoint/2010/main" xmlns:a="http://schemas.openxmlformats.org/drawingml/2006/main" xmlns:r="http://schemas.openxmlformats.org/officeDocument/2006/relationships" xmlns:p="http://schemas.openxmlformats.org/presentationml/2006/main" preserve="1" userDrawn="1">
   <p:cSld name="1_Circuitry_Primary Colors">
     <p:spTree>
       <p:nvGrpSpPr>
@@ -8628,7 +8628,7 @@
 </file>
 
 <file path=ppt/slideLayouts/slideLayout8.xml><?xml version="1.0" encoding="utf-8"?>
-<p:sldLayout xmlns:a="http://schemas.openxmlformats.org/drawingml/2006/main" xmlns:r="http://schemas.openxmlformats.org/officeDocument/2006/relationships" xmlns:p="http://schemas.openxmlformats.org/presentationml/2006/main" userDrawn="1">
+<p:sldLayout xmlns:a16="http://schemas.microsoft.com/office/drawing/2014/main" xmlns:a14="http://schemas.microsoft.com/office/drawing/2010/main" xmlns:ahyp="http://schemas.microsoft.com/office/drawing/2018/hyperlinkcolor" xmlns:p14="http://schemas.microsoft.com/office/powerpoint/2010/main" xmlns:a="http://schemas.openxmlformats.org/drawingml/2006/main" xmlns:r="http://schemas.openxmlformats.org/officeDocument/2006/relationships" xmlns:p="http://schemas.openxmlformats.org/presentationml/2006/main" userDrawn="1">
   <p:cSld name="Thank You Slide">
     <p:spTree>
       <p:nvGrpSpPr>
@@ -9213,7 +9213,7 @@
 </file>
 
 <file path=ppt/slideMasters/slideMaster1.xml><?xml version="1.0" encoding="utf-8"?>
-<p:sldMaster xmlns:a="http://schemas.openxmlformats.org/drawingml/2006/main" xmlns:r="http://schemas.openxmlformats.org/officeDocument/2006/relationships" xmlns:p="http://schemas.openxmlformats.org/presentationml/2006/main">
+<p:sldMaster xmlns:a16="http://schemas.microsoft.com/office/drawing/2014/main" xmlns:p14="http://schemas.microsoft.com/office/powerpoint/2010/main" xmlns:p15="http://schemas.microsoft.com/office/powerpoint/2012/main" xmlns:a="http://schemas.openxmlformats.org/drawingml/2006/main" xmlns:r="http://schemas.openxmlformats.org/officeDocument/2006/relationships" xmlns:p="http://schemas.openxmlformats.org/presentationml/2006/main">
   <p:cSld>
     <p:bg>
       <p:bgRef idx="1001">
@@ -9649,7 +9649,7 @@
 </file>
 
 <file path=ppt/slides/slide1.xml><?xml version="1.0" encoding="utf-8"?>
-<p:sld xmlns:a="http://schemas.openxmlformats.org/drawingml/2006/main" xmlns:r="http://schemas.openxmlformats.org/officeDocument/2006/relationships" xmlns:p="http://schemas.openxmlformats.org/presentationml/2006/main">
+<p:sld xmlns:a16="http://schemas.microsoft.com/office/drawing/2014/main" xmlns:a14="http://schemas.microsoft.com/office/drawing/2010/main" xmlns:p14="http://schemas.microsoft.com/office/powerpoint/2010/main" xmlns:a="http://schemas.openxmlformats.org/drawingml/2006/main" xmlns:r="http://schemas.openxmlformats.org/officeDocument/2006/relationships" xmlns:p="http://schemas.openxmlformats.org/presentationml/2006/main">
   <p:cSld>
     <p:spTree>
       <p:nvGrpSpPr>
@@ -9775,7 +9775,7 @@
 </file>
 
 <file path=ppt/slides/slide2.xml><?xml version="1.0" encoding="utf-8"?>
-<p:sld xmlns:a="http://schemas.openxmlformats.org/drawingml/2006/main" xmlns:r="http://schemas.openxmlformats.org/officeDocument/2006/relationships" xmlns:p="http://schemas.openxmlformats.org/presentationml/2006/main">
+<p:sld xmlns:a16="http://schemas.microsoft.com/office/drawing/2014/main" xmlns:a14="http://schemas.microsoft.com/office/drawing/2010/main" xmlns:p14="http://schemas.microsoft.com/office/powerpoint/2010/main" xmlns:a="http://schemas.openxmlformats.org/drawingml/2006/main" xmlns:r="http://schemas.openxmlformats.org/officeDocument/2006/relationships" xmlns:p="http://schemas.openxmlformats.org/presentationml/2006/main">
   <p:cSld>
     <p:spTree>
       <p:nvGrpSpPr>
@@ -10363,7 +10363,7 @@
 </file>
 
 <file path=ppt/slides/slide3.xml><?xml version="1.0" encoding="utf-8"?>
-<p:sld xmlns:a="http://schemas.openxmlformats.org/drawingml/2006/main" xmlns:r="http://schemas.openxmlformats.org/officeDocument/2006/relationships" xmlns:p="http://schemas.openxmlformats.org/presentationml/2006/main">
+<p:sld xmlns:a16="http://schemas.microsoft.com/office/drawing/2014/main" xmlns:a14="http://schemas.microsoft.com/office/drawing/2010/main" xmlns:p14="http://schemas.microsoft.com/office/powerpoint/2010/main" xmlns:a="http://schemas.openxmlformats.org/drawingml/2006/main" xmlns:r="http://schemas.openxmlformats.org/officeDocument/2006/relationships" xmlns:p="http://schemas.openxmlformats.org/presentationml/2006/main">
   <p:cSld>
     <p:spTree>
       <p:nvGrpSpPr>
@@ -10764,7 +10764,7 @@
                 <a:latin typeface="Roboto Medium" panose="02000000000000000000" pitchFamily="2" charset="0"/>
                 <a:ea typeface="Roboto Medium" panose="02000000000000000000" pitchFamily="2" charset="0"/>
               </a:rPr>
-              <a:t>{{CustomerName}}</a:t>
+              <a:t>A. Datum Corporation</a:t>
             </a:r>
           </a:p>
         </p:txBody>
@@ -11285,7 +11285,7 @@
 </file>
 
 <file path=ppt/slides/slide4.xml><?xml version="1.0" encoding="utf-8"?>
-<p:sld xmlns:a="http://schemas.openxmlformats.org/drawingml/2006/main" xmlns:r="http://schemas.openxmlformats.org/officeDocument/2006/relationships" xmlns:p="http://schemas.openxmlformats.org/presentationml/2006/main">
+<p:sld xmlns:a16="http://schemas.microsoft.com/office/drawing/2014/main" xmlns:asvg="http://schemas.microsoft.com/office/drawing/2016/SVG/main" xmlns:p14="http://schemas.microsoft.com/office/powerpoint/2010/main" xmlns:a="http://schemas.openxmlformats.org/drawingml/2006/main" xmlns:r="http://schemas.openxmlformats.org/officeDocument/2006/relationships" xmlns:p="http://schemas.openxmlformats.org/presentationml/2006/main">
   <p:cSld>
     <p:spTree>
       <p:nvGrpSpPr>
@@ -12547,7 +12547,7 @@
 </file>
 
 <file path=ppt/slides/slide5.xml><?xml version="1.0" encoding="utf-8"?>
-<p:sld xmlns:a="http://schemas.openxmlformats.org/drawingml/2006/main" xmlns:r="http://schemas.openxmlformats.org/officeDocument/2006/relationships" xmlns:p="http://schemas.openxmlformats.org/presentationml/2006/main">
+<p:sld xmlns:a16="http://schemas.microsoft.com/office/drawing/2014/main" xmlns:p14="http://schemas.microsoft.com/office/powerpoint/2010/main" xmlns:a="http://schemas.openxmlformats.org/drawingml/2006/main" xmlns:r="http://schemas.openxmlformats.org/officeDocument/2006/relationships" xmlns:p="http://schemas.openxmlformats.org/presentationml/2006/main">
   <p:cSld>
     <p:spTree>
       <p:nvGrpSpPr>
@@ -12677,7 +12677,7 @@
 </file>
 
 <file path=ppt/slides/slide6.xml><?xml version="1.0" encoding="utf-8"?>
-<p:sld xmlns:a="http://schemas.openxmlformats.org/drawingml/2006/main" xmlns:r="http://schemas.openxmlformats.org/officeDocument/2006/relationships" xmlns:p="http://schemas.openxmlformats.org/presentationml/2006/main">
+<p:sld xmlns:a16="http://schemas.microsoft.com/office/drawing/2014/main" xmlns:p14="http://schemas.microsoft.com/office/powerpoint/2010/main" xmlns:a="http://schemas.openxmlformats.org/drawingml/2006/main" xmlns:r="http://schemas.openxmlformats.org/officeDocument/2006/relationships" xmlns:p="http://schemas.openxmlformats.org/presentationml/2006/main">
   <p:cSld>
     <p:spTree>
       <p:nvGrpSpPr>
@@ -12986,7 +12986,7 @@
 </file>
 
 <file path=ppt/slides/slide7.xml><?xml version="1.0" encoding="utf-8"?>
-<p:sld xmlns:a="http://schemas.openxmlformats.org/drawingml/2006/main" xmlns:r="http://schemas.openxmlformats.org/officeDocument/2006/relationships" xmlns:p="http://schemas.openxmlformats.org/presentationml/2006/main">
+<p:sld xmlns:a16="http://schemas.microsoft.com/office/drawing/2014/main" xmlns:p14="http://schemas.microsoft.com/office/powerpoint/2010/main" xmlns:a="http://schemas.openxmlformats.org/drawingml/2006/main" xmlns:r="http://schemas.openxmlformats.org/officeDocument/2006/relationships" xmlns:p="http://schemas.openxmlformats.org/presentationml/2006/main">
   <p:cSld>
     <p:spTree>
       <p:nvGrpSpPr>
@@ -13443,7 +13443,7 @@
 </file>
 
 <file path=ppt/slides/slide8.xml><?xml version="1.0" encoding="utf-8"?>
-<p:sld xmlns:a="http://schemas.openxmlformats.org/drawingml/2006/main" xmlns:r="http://schemas.openxmlformats.org/officeDocument/2006/relationships" xmlns:p="http://schemas.openxmlformats.org/presentationml/2006/main">
+<p:sld xmlns:a16="http://schemas.microsoft.com/office/drawing/2014/main" xmlns:asvg="http://schemas.microsoft.com/office/drawing/2016/SVG/main" xmlns:p14="http://schemas.microsoft.com/office/powerpoint/2010/main" xmlns:a="http://schemas.openxmlformats.org/drawingml/2006/main" xmlns:r="http://schemas.openxmlformats.org/officeDocument/2006/relationships" xmlns:p="http://schemas.openxmlformats.org/presentationml/2006/main">
   <p:cSld>
     <p:spTree>
       <p:nvGrpSpPr>
@@ -14352,7 +14352,7 @@
 </file>
 
 <file path=ppt/slides/slide9.xml><?xml version="1.0" encoding="utf-8"?>
-<p:sld xmlns:a="http://schemas.openxmlformats.org/drawingml/2006/main" xmlns:r="http://schemas.openxmlformats.org/officeDocument/2006/relationships" xmlns:p="http://schemas.openxmlformats.org/presentationml/2006/main">
+<p:sld xmlns:a16="http://schemas.microsoft.com/office/drawing/2014/main" xmlns:p14="http://schemas.microsoft.com/office/powerpoint/2010/main" xmlns:a="http://schemas.openxmlformats.org/drawingml/2006/main" xmlns:r="http://schemas.openxmlformats.org/officeDocument/2006/relationships" xmlns:p="http://schemas.openxmlformats.org/presentationml/2006/main">
   <p:cSld>
     <p:spTree>
       <p:nvGrpSpPr>

--- a/create-a-project-from-cost-opt-20260216205726/artifacts/kickoff-deck.pptx
+++ b/create-a-project-from-cost-opt-20260216205726/artifacts/kickoff-deck.pptx
@@ -20,6 +20,8 @@
     <p:sldId id="858" r:id="rId11"/>
     <p:sldId id="859" r:id="rId12"/>
     <p:sldId id="554" r:id="rId13"/>
+    <p:sldId id="901" r:id="rId35"/>
+    <p:sldId id="902" r:id="rId36"/>
   </p:sldIdLst>
   <p:sldSz cx="12192000" cy="6858000"/>
   <p:notesSz cx="6858000" cy="9144000"/>
@@ -9767,6 +9769,302 @@
         <p14:creationId xmlns:p14="http://schemas.microsoft.com/office/powerpoint/2010/main" val="247990684"/>
       </p:ext>
     </p:extLst>
+  </p:cSld>
+  <p:clrMapOvr>
+    <a:masterClrMapping/>
+  </p:clrMapOvr>
+</p:sld>
+</file>
+
+<file path=ppt/slides/slide10.xml><?xml version="1.0" encoding="utf-8"?>
+<p:sld xmlns:a="http://schemas.openxmlformats.org/drawingml/2006/main" xmlns:p="http://schemas.openxmlformats.org/presentationml/2006/main" xmlns:r="http://schemas.openxmlformats.org/officeDocument/2006/relationships">
+  <p:cSld>
+    <p:spTree>
+      <p:nvGrpSpPr>
+        <p:cNvPr id="1" name=""/>
+        <p:cNvGrpSpPr/>
+        <p:nvPr/>
+      </p:nvGrpSpPr>
+      <p:grpSpPr/>
+      <p:sp>
+        <p:nvSpPr>
+          <p:cNvPr id="2" name="TextBox 1"/>
+          <p:cNvSpPr txBox="1"/>
+          <p:nvPr/>
+        </p:nvSpPr>
+        <p:spPr>
+          <a:xfrm>
+            <a:off x="457200" y="457200"/>
+            <a:ext cx="8229600" cy="914400"/>
+          </a:xfrm>
+          <a:prstGeom prst="rect">
+            <a:avLst/>
+          </a:prstGeom>
+          <a:noFill/>
+        </p:spPr>
+        <p:txBody>
+          <a:bodyPr wrap="none">
+            <a:spAutoFit/>
+          </a:bodyPr>
+          <a:lstStyle/>
+          <a:p>
+            <a:pPr>
+              <a:defRPr sz="4400" b="1"/>
+            </a:pPr>
+            <a:r>
+              <a:t>Meeting Summary</a:t>
+            </a:r>
+          </a:p>
+        </p:txBody>
+      </p:sp>
+      <p:sp>
+        <p:nvSpPr>
+          <p:cNvPr id="3" name="TextBox 2"/>
+          <p:cNvSpPr txBox="1"/>
+          <p:nvPr/>
+        </p:nvSpPr>
+        <p:spPr>
+          <a:xfrm>
+            <a:off x="457200" y="1645920"/>
+            <a:ext cx="8229600" cy="4114800"/>
+          </a:xfrm>
+          <a:prstGeom prst="rect">
+            <a:avLst/>
+          </a:prstGeom>
+          <a:noFill/>
+        </p:spPr>
+        <p:txBody>
+          <a:bodyPr wrap="square">
+            <a:spAutoFit/>
+          </a:bodyPr>
+          <a:lstStyle/>
+          <a:p>
+            <a:pPr>
+              <a:defRPr sz="1800"/>
+            </a:pPr>
+            <a:r>
+              <a:t>Date: Meeting with Andrey Kerchin</a:t>
+            </a:r>
+          </a:p>
+          <a:p>
+            <a:pPr>
+              <a:defRPr sz="1800"/>
+            </a:pPr>
+            <a:r>
+              <a:t>Topic: Kickoff Meeting</a:t>
+            </a:r>
+          </a:p>
+          <a:p>
+            <a:pPr>
+              <a:defRPr sz="1800"/>
+            </a:pPr>
+            <a:r>
+              <a:t>Participants:</a:t>
+            </a:r>
+          </a:p>
+          <a:p>
+            <a:pPr lvl="1">
+              <a:defRPr sz="1800"/>
+            </a:pPr>
+            <a:r>
+              <a:t>Andrey Kerchin</a:t>
+            </a:r>
+          </a:p>
+          <a:p>
+            <a:pPr>
+              <a:defRPr sz="1800"/>
+            </a:pPr>
+            <a:r>
+              <a:t>Key Points:</a:t>
+            </a:r>
+          </a:p>
+          <a:p>
+            <a:pPr lvl="1">
+              <a:defRPr sz="1800"/>
+            </a:pPr>
+            <a:r>
+              <a:t>Communication check performed</a:t>
+            </a:r>
+          </a:p>
+          <a:p>
+            <a:pPr lvl="1">
+              <a:defRPr sz="1800"/>
+            </a:pPr>
+            <a:r>
+              <a:t>Meeting initialization and setup</a:t>
+            </a:r>
+          </a:p>
+          <a:p>
+            <a:pPr lvl="1">
+              <a:defRPr sz="1800"/>
+            </a:pPr>
+            <a:r>
+              <a:t>Baseline coordination established</a:t>
+            </a:r>
+          </a:p>
+        </p:txBody>
+      </p:sp>
+    </p:spTree>
+  </p:cSld>
+  <p:clrMapOvr>
+    <a:masterClrMapping/>
+  </p:clrMapOvr>
+</p:sld>
+</file>
+
+<file path=ppt/slides/slide11.xml><?xml version="1.0" encoding="utf-8"?>
+<p:sld xmlns:a="http://schemas.openxmlformats.org/drawingml/2006/main" xmlns:p="http://schemas.openxmlformats.org/presentationml/2006/main" xmlns:r="http://schemas.openxmlformats.org/officeDocument/2006/relationships">
+  <p:cSld>
+    <p:spTree>
+      <p:nvGrpSpPr>
+        <p:cNvPr id="1" name=""/>
+        <p:cNvGrpSpPr/>
+        <p:nvPr/>
+      </p:nvGrpSpPr>
+      <p:grpSpPr/>
+      <p:sp>
+        <p:nvSpPr>
+          <p:cNvPr id="2" name="TextBox 1"/>
+          <p:cNvSpPr txBox="1"/>
+          <p:nvPr/>
+        </p:nvSpPr>
+        <p:spPr>
+          <a:xfrm>
+            <a:off x="457200" y="1645920"/>
+            <a:ext cx="8229600" cy="4114800"/>
+          </a:xfrm>
+          <a:prstGeom prst="rect">
+            <a:avLst/>
+          </a:prstGeom>
+          <a:noFill/>
+        </p:spPr>
+        <p:txBody>
+          <a:bodyPr wrap="none">
+            <a:spAutoFit/>
+          </a:bodyPr>
+          <a:lstStyle/>
+          <a:p>
+            <a:pPr>
+              <a:defRPr sz="4400" b="1"/>
+            </a:pPr>
+            <a:r>
+              <a:t>Agreed Recommendations &amp; Action Items</a:t>
+            </a:r>
+          </a:p>
+        </p:txBody>
+      </p:sp>
+      <p:sp>
+        <p:nvSpPr>
+          <p:cNvPr id="3" name="TextBox 2"/>
+          <p:cNvSpPr txBox="1"/>
+          <p:nvPr/>
+        </p:nvSpPr>
+        <p:spPr>
+          <a:xfrm>
+            <a:off x="457200" y="1645920"/>
+            <a:ext cx="8229600" cy="4114800"/>
+          </a:xfrm>
+          <a:prstGeom prst="rect">
+            <a:avLst/>
+          </a:prstGeom>
+          <a:noFill/>
+        </p:spPr>
+        <p:txBody>
+          <a:bodyPr wrap="square">
+            <a:spAutoFit/>
+          </a:bodyPr>
+          <a:lstStyle/>
+          <a:p>
+            <a:pPr>
+              <a:defRPr sz="1800"/>
+            </a:pPr>
+            <a:r>
+              <a:t>Recommendations:</a:t>
+            </a:r>
+          </a:p>
+          <a:p>
+            <a:pPr lvl="1">
+              <a:defRPr sz="1800"/>
+            </a:pPr>
+            <a:r>
+              <a:t>Establish clear communication protocols</a:t>
+            </a:r>
+          </a:p>
+          <a:p>
+            <a:pPr lvl="1">
+              <a:defRPr sz="1800"/>
+            </a:pPr>
+            <a:r>
+              <a:t>Maintain open channels for coordination</a:t>
+            </a:r>
+          </a:p>
+          <a:p>
+            <a:pPr>
+              <a:defRPr sz="1800"/>
+            </a:pPr>
+            <a:r>
+              <a:t>Action Items:</a:t>
+            </a:r>
+          </a:p>
+          <a:p>
+            <a:pPr lvl="1">
+              <a:defRPr sz="1800"/>
+            </a:pPr>
+            <a:r>
+              <a:t>Status: Pending final action items from meeting</a:t>
+            </a:r>
+          </a:p>
+          <a:p>
+            <a:pPr lvl="1">
+              <a:defRPr sz="1800"/>
+            </a:pPr>
+            <a:r>
+              <a:t>Owner: TBD</a:t>
+            </a:r>
+          </a:p>
+          <a:p>
+            <a:pPr lvl="1">
+              <a:defRPr sz="1800"/>
+            </a:pPr>
+            <a:r>
+              <a:t>Due Date: TBD</a:t>
+            </a:r>
+          </a:p>
+          <a:p>
+            <a:pPr>
+              <a:defRPr sz="1800"/>
+            </a:pPr>
+            <a:r>
+              <a:t>Next Steps:</a:t>
+            </a:r>
+          </a:p>
+          <a:p>
+            <a:pPr lvl="1">
+              <a:defRPr sz="1800"/>
+            </a:pPr>
+            <a:r>
+              <a:t>Await detailed action item assignments</a:t>
+            </a:r>
+          </a:p>
+          <a:p>
+            <a:pPr lvl="1">
+              <a:defRPr sz="1800"/>
+            </a:pPr>
+            <a:r>
+              <a:t>Schedule follow-up coordination meeting</a:t>
+            </a:r>
+          </a:p>
+          <a:p>
+            <a:pPr lvl="1">
+              <a:defRPr sz="1800"/>
+            </a:pPr>
+            <a:r>
+              <a:t>Document final decisions and commitments</a:t>
+            </a:r>
+          </a:p>
+        </p:txBody>
+      </p:sp>
+    </p:spTree>
   </p:cSld>
   <p:clrMapOvr>
     <a:masterClrMapping/>

--- a/create-a-project-from-cost-opt-20260216205726/artifacts/kickoff-deck.pptx
+++ b/create-a-project-from-cost-opt-20260216205726/artifacts/kickoff-deck.pptx
@@ -22,6 +22,8 @@
     <p:sldId id="554" r:id="rId13"/>
     <p:sldId id="901" r:id="rId35"/>
     <p:sldId id="902" r:id="rId36"/>
+    <p:sldId id="903" r:id="rId37"/>
+    <p:sldId id="904" r:id="rId38"/>
   </p:sldIdLst>
   <p:sldSz cx="12192000" cy="6858000"/>
   <p:notesSz cx="6858000" cy="9144000"/>
@@ -10062,6 +10064,206 @@
               <a:t>Document final decisions and commitments</a:t>
             </a:r>
           </a:p>
+        </p:txBody>
+      </p:sp>
+    </p:spTree>
+  </p:cSld>
+  <p:clrMapOvr>
+    <a:masterClrMapping/>
+  </p:clrMapOvr>
+</p:sld>
+</file>
+
+<file path=ppt/slides/slide12.xml><?xml version="1.0" encoding="utf-8"?>
+<p:sld xmlns:a="http://schemas.openxmlformats.org/drawingml/2006/main" xmlns:p="http://schemas.openxmlformats.org/presentationml/2006/main" xmlns:r="http://schemas.openxmlformats.org/officeDocument/2006/relationships">
+  <p:cSld>
+    <p:spTree>
+      <p:nvGrpSpPr>
+        <p:cNvPr id="1" name=""/>
+        <p:cNvGrpSpPr/>
+        <p:nvPr/>
+      </p:nvGrpSpPr>
+      <p:grpSpPr/>
+      <p:sp>
+        <p:nvSpPr>
+          <p:cNvPr id="2" name="Text Placeholder 1"/>
+          <p:cNvSpPr>
+            <a:spLocks noGrp="1"/>
+          </p:cNvSpPr>
+          <p:nvPr>
+            <p:ph type="body" idx="10" sz="quarter"/>
+          </p:nvPr>
+        </p:nvSpPr>
+        <p:spPr/>
+        <p:txBody>
+          <a:bodyPr/>
+          <a:lstStyle/>
+          <a:p/>
+        </p:txBody>
+      </p:sp>
+      <p:sp>
+        <p:nvSpPr>
+          <p:cNvPr id="3" name="Text Placeholder 2"/>
+          <p:cNvSpPr>
+            <a:spLocks noGrp="1"/>
+          </p:cNvSpPr>
+          <p:nvPr>
+            <p:ph type="body" idx="11" sz="quarter"/>
+          </p:nvPr>
+        </p:nvSpPr>
+        <p:spPr/>
+        <p:txBody>
+          <a:bodyPr/>
+          <a:lstStyle/>
+          <a:p>
+            <a:pPr>
+              <a:defRPr sz="1400"/>
+            </a:pPr>
+            <a:r>
+              <a:t>Date: [Insert Date of Meeting]</a:t>
+            </a:r>
+            <a:br/>
+            <a:r>
+              <a:t>Time: [Insert Time of Meeting]</a:t>
+            </a:r>
+            <a:br/>
+            <a:r>
+              <a:t>Participants: Andrey Kerchin</a:t>
+            </a:r>
+            <a:br/>
+            <a:br/>
+            <a:r>
+              <a:t>Key Decisions:</a:t>
+            </a:r>
+            <a:br/>
+            <a:r>
+              <a:t>• None explicitly stated in the provided transcript.</a:t>
+            </a:r>
+            <a:br/>
+            <a:br/>
+            <a:r>
+              <a:t>Discussed Recommendations:</a:t>
+            </a:r>
+            <a:br/>
+            <a:r>
+              <a:t>• None explicitly stated in the provided transcript.</a:t>
+            </a:r>
+            <a:br/>
+            <a:br/>
+            <a:r>
+              <a:t>Notes:</a:t>
+            </a:r>
+            <a:br/>
+            <a:r>
+              <a:t>The provided transcript consists solely of a sound check and connection test by Andrey Kerchin. No substantive discussion, decisions, recommendations, or action items were captured.</a:t>
+            </a:r>
+          </a:p>
+        </p:txBody>
+      </p:sp>
+      <p:sp>
+        <p:nvSpPr>
+          <p:cNvPr id="4" name="Text Placeholder 3"/>
+          <p:cNvSpPr>
+            <a:spLocks noGrp="1"/>
+          </p:cNvSpPr>
+          <p:nvPr>
+            <p:ph type="body" idx="12" sz="quarter"/>
+          </p:nvPr>
+        </p:nvSpPr>
+        <p:spPr/>
+        <p:txBody>
+          <a:bodyPr/>
+          <a:lstStyle/>
+          <a:p/>
+        </p:txBody>
+      </p:sp>
+    </p:spTree>
+  </p:cSld>
+  <p:clrMapOvr>
+    <a:masterClrMapping/>
+  </p:clrMapOvr>
+</p:sld>
+</file>
+
+<file path=ppt/slides/slide13.xml><?xml version="1.0" encoding="utf-8"?>
+<p:sld xmlns:a="http://schemas.openxmlformats.org/drawingml/2006/main" xmlns:p="http://schemas.openxmlformats.org/presentationml/2006/main" xmlns:r="http://schemas.openxmlformats.org/officeDocument/2006/relationships">
+  <p:cSld>
+    <p:spTree>
+      <p:nvGrpSpPr>
+        <p:cNvPr id="1" name=""/>
+        <p:cNvGrpSpPr/>
+        <p:nvPr/>
+      </p:nvGrpSpPr>
+      <p:grpSpPr/>
+      <p:sp>
+        <p:nvSpPr>
+          <p:cNvPr id="2" name="Text Placeholder 1"/>
+          <p:cNvSpPr>
+            <a:spLocks noGrp="1"/>
+          </p:cNvSpPr>
+          <p:nvPr>
+            <p:ph type="body" idx="10" sz="quarter"/>
+          </p:nvPr>
+        </p:nvSpPr>
+        <p:spPr/>
+        <p:txBody>
+          <a:bodyPr/>
+          <a:lstStyle/>
+          <a:p/>
+        </p:txBody>
+      </p:sp>
+      <p:sp>
+        <p:nvSpPr>
+          <p:cNvPr id="3" name="Text Placeholder 2"/>
+          <p:cNvSpPr>
+            <a:spLocks noGrp="1"/>
+          </p:cNvSpPr>
+          <p:nvPr>
+            <p:ph type="body" idx="11" sz="quarter"/>
+          </p:nvPr>
+        </p:nvSpPr>
+        <p:spPr/>
+        <p:txBody>
+          <a:bodyPr/>
+          <a:lstStyle/>
+          <a:p>
+            <a:pPr>
+              <a:defRPr sz="1400"/>
+            </a:pPr>
+            <a:r>
+              <a:t>Agreed Action Items:</a:t>
+            </a:r>
+            <a:br/>
+            <a:r>
+              <a:t>• None explicitly stated in the provided transcript.</a:t>
+            </a:r>
+            <a:br/>
+            <a:br/>
+            <a:r>
+              <a:t>Status:</a:t>
+            </a:r>
+            <a:br/>
+            <a:r>
+              <a:t>The meeting did not result in any specific action items, as the discussion was limited to connection and audio testing.</a:t>
+            </a:r>
+          </a:p>
+        </p:txBody>
+      </p:sp>
+      <p:sp>
+        <p:nvSpPr>
+          <p:cNvPr id="4" name="Text Placeholder 3"/>
+          <p:cNvSpPr>
+            <a:spLocks noGrp="1"/>
+          </p:cNvSpPr>
+          <p:nvPr>
+            <p:ph type="body" idx="12" sz="quarter"/>
+          </p:nvPr>
+        </p:nvSpPr>
+        <p:spPr/>
+        <p:txBody>
+          <a:bodyPr/>
+          <a:lstStyle/>
+          <a:p/>
         </p:txBody>
       </p:sp>
     </p:spTree>
